--- a/materials/pdf/original/DS13_Folien_Klammern-Spiegel-Programme.pptx
+++ b/materials/pdf/original/DS13_Folien_Klammern-Spiegel-Programme.pptx
@@ -126,12 +126,12 @@
   <p:extLst>
     <p:ext uri="{521415D9-36F7-43E2-AB2F-B90AF26B5E84}">
       <p14:sectionLst xmlns:p14="http://schemas.microsoft.com/office/powerpoint/2010/main">
-        <p14:section name="Start" id="{0ee6a4f5-d44d-6eed-f0db-9890ace18add}">
+        <p14:section name="Start" id="{5f3de32f-14e3-43d4-5b04-7013dca64495}">
           <p14:sldIdLst>
             <p14:sldId id="256"/>
           </p14:sldIdLst>
         </p14:section>
-        <p14:section name="Einstieg" id="{3f979471-a475-5c57-3512-9f77b141ffd3}">
+        <p14:section name="Einstieg" id="{480b54a8-a198-2f8a-17fd-11447b8c8137}">
           <p14:sldIdLst>
             <p14:sldId id="257"/>
             <p14:sldId id="258"/>
@@ -139,7 +139,7 @@
             <p14:sldId id="260"/>
           </p14:sldIdLst>
         </p14:section>
-        <p14:section name="Erarbeitung" id="{18647a02-cdff-9055-6217-1b189e55e4df}">
+        <p14:section name="Erarbeitung" id="{cb7cfec8-d84c-d55c-29b9-9df04ab5b6b3}">
           <p14:sldIdLst>
             <p14:sldId id="261"/>
             <p14:sldId id="262"/>
@@ -151,21 +151,21 @@
             <p14:sldId id="268"/>
           </p14:sldIdLst>
         </p14:section>
-        <p14:section name="Übung" id="{3af231c0-56fa-f1d6-3f18-0318798b8178}">
+        <p14:section name="Übung" id="{5fe30af4-505e-a885-e729-47a1bc401fc2}">
           <p14:sldIdLst>
             <p14:sldId id="269"/>
             <p14:sldId id="270"/>
             <p14:sldId id="271"/>
           </p14:sldIdLst>
         </p14:section>
-        <p14:section name="Sicherung" id="{951c9c2b-b323-bb23-01f1-96657de14a4a}">
+        <p14:section name="Sicherung" id="{90ae88df-e137-7e53-d538-9c88f125d803}">
           <p14:sldIdLst>
             <p14:sldId id="272"/>
             <p14:sldId id="273"/>
             <p14:sldId id="274"/>
           </p14:sldIdLst>
         </p14:section>
-        <p14:section name="Abschluss" id="{d7a55ac4-08c4-7a86-a9f2-cb5c64d7a4da}">
+        <p14:section name="Abschluss" id="{2418a2ee-2f35-6b74-21df-ad93568abd6d}">
           <p14:sldIdLst>
             <p14:sldId id="275"/>
           </p14:sldIdLst>
@@ -2573,6 +2573,45 @@
       </p:sp>
       <p:sp>
         <p:nvSpPr>
+          <p:cNvPr id="4" name="Text 1"/>
+          <p:cNvSpPr/>
+          <p:nvPr/>
+        </p:nvSpPr>
+        <p:spPr>
+          <a:xfrm>
+            <a:off x="7985455" y="6473952"/>
+            <a:ext cx="2926080" cy="274320"/>
+          </a:xfrm>
+          <a:prstGeom prst="rect">
+            <a:avLst/>
+          </a:prstGeom>
+          <a:noFill/>
+          <a:ln/>
+        </p:spPr>
+        <p:txBody>
+          <a:bodyPr wrap="square" lIns="0" tIns="0" rIns="0" bIns="0" rtlCol="0" anchor="ctr"/>
+          <a:lstStyle/>
+          <a:p>
+            <a:pPr algn="r" indent="0" marL="0">
+              <a:buNone/>
+            </a:pPr>
+            <a:r>
+              <a:rPr lang="en-US" sz="1100" dirty="0">
+                <a:solidFill>
+                  <a:srgbClr val="5B6770"/>
+                </a:solidFill>
+                <a:latin typeface="Calibri" pitchFamily="34" charset="0"/>
+                <a:ea typeface="Calibri" pitchFamily="34" charset="-122"/>
+                <a:cs typeface="Calibri" pitchFamily="34" charset="-120"/>
+              </a:rPr>
+              <a:t>CC BY-SA 4.0 · Frank Juchim</a:t>
+            </a:r>
+            <a:endParaRPr lang="en-US" sz="1100" dirty="0"/>
+          </a:p>
+        </p:txBody>
+      </p:sp>
+      <p:sp>
+        <p:nvSpPr>
           <p:cNvPr id="25" name="Slide Number Placeholder 0"/>
           <p:cNvSpPr>
             <a:spLocks noGrp="1"/>
@@ -2724,6 +2763,45 @@
                 <a:cs typeface="Calibri" pitchFamily="34" charset="-120"/>
               </a:rPr>
               <a:t>Level 13 · Welt C · Formale Sprachen · nur eA (Leistungskurs)</a:t>
+            </a:r>
+            <a:endParaRPr lang="en-US" sz="1100" dirty="0"/>
+          </a:p>
+        </p:txBody>
+      </p:sp>
+      <p:sp>
+        <p:nvSpPr>
+          <p:cNvPr id="4" name="Text 1"/>
+          <p:cNvSpPr/>
+          <p:nvPr/>
+        </p:nvSpPr>
+        <p:spPr>
+          <a:xfrm>
+            <a:off x="7985455" y="6473952"/>
+            <a:ext cx="2926080" cy="274320"/>
+          </a:xfrm>
+          <a:prstGeom prst="rect">
+            <a:avLst/>
+          </a:prstGeom>
+          <a:noFill/>
+          <a:ln/>
+        </p:spPr>
+        <p:txBody>
+          <a:bodyPr wrap="square" lIns="0" tIns="0" rIns="0" bIns="0" rtlCol="0" anchor="ctr"/>
+          <a:lstStyle/>
+          <a:p>
+            <a:pPr algn="r" indent="0" marL="0">
+              <a:buNone/>
+            </a:pPr>
+            <a:r>
+              <a:rPr lang="en-US" sz="1100" dirty="0">
+                <a:solidFill>
+                  <a:srgbClr val="5B6770"/>
+                </a:solidFill>
+                <a:latin typeface="Calibri" pitchFamily="34" charset="0"/>
+                <a:ea typeface="Calibri" pitchFamily="34" charset="-122"/>
+                <a:cs typeface="Calibri" pitchFamily="34" charset="-120"/>
+              </a:rPr>
+              <a:t>CC BY-SA 4.0 · Frank Juchim</a:t>
             </a:r>
             <a:endParaRPr lang="en-US" sz="1100" dirty="0"/>
           </a:p>
